--- a/assets/text-to-sql pipline.pptx
+++ b/assets/text-to-sql pipline.pptx
@@ -254,7 +254,7 @@
           <a:p>
             <a:fld id="{D997B5FA-0921-464F-AAE1-844C04324D75}" type="datetimeFigureOut">
               <a:rPr lang="zh-CN" altLang="en-US" smtClean="0"/>
-              <a:t>2026/6/16</a:t>
+              <a:t>2026/7/1</a:t>
             </a:fld>
             <a:endParaRPr lang="zh-CN" altLang="en-US"/>
           </a:p>
@@ -424,7 +424,7 @@
           <a:p>
             <a:fld id="{D997B5FA-0921-464F-AAE1-844C04324D75}" type="datetimeFigureOut">
               <a:rPr lang="zh-CN" altLang="en-US" smtClean="0"/>
-              <a:t>2026/6/16</a:t>
+              <a:t>2026/7/1</a:t>
             </a:fld>
             <a:endParaRPr lang="zh-CN" altLang="en-US"/>
           </a:p>
@@ -604,7 +604,7 @@
           <a:p>
             <a:fld id="{D997B5FA-0921-464F-AAE1-844C04324D75}" type="datetimeFigureOut">
               <a:rPr lang="zh-CN" altLang="en-US" smtClean="0"/>
-              <a:t>2026/6/16</a:t>
+              <a:t>2026/7/1</a:t>
             </a:fld>
             <a:endParaRPr lang="zh-CN" altLang="en-US"/>
           </a:p>
@@ -774,7 +774,7 @@
           <a:p>
             <a:fld id="{D997B5FA-0921-464F-AAE1-844C04324D75}" type="datetimeFigureOut">
               <a:rPr lang="zh-CN" altLang="en-US" smtClean="0"/>
-              <a:t>2026/6/16</a:t>
+              <a:t>2026/7/1</a:t>
             </a:fld>
             <a:endParaRPr lang="zh-CN" altLang="en-US"/>
           </a:p>
@@ -1020,7 +1020,7 @@
           <a:p>
             <a:fld id="{D997B5FA-0921-464F-AAE1-844C04324D75}" type="datetimeFigureOut">
               <a:rPr lang="zh-CN" altLang="en-US" smtClean="0"/>
-              <a:t>2026/6/16</a:t>
+              <a:t>2026/7/1</a:t>
             </a:fld>
             <a:endParaRPr lang="zh-CN" altLang="en-US"/>
           </a:p>
@@ -1252,7 +1252,7 @@
           <a:p>
             <a:fld id="{D997B5FA-0921-464F-AAE1-844C04324D75}" type="datetimeFigureOut">
               <a:rPr lang="zh-CN" altLang="en-US" smtClean="0"/>
-              <a:t>2026/6/16</a:t>
+              <a:t>2026/7/1</a:t>
             </a:fld>
             <a:endParaRPr lang="zh-CN" altLang="en-US"/>
           </a:p>
@@ -1619,7 +1619,7 @@
           <a:p>
             <a:fld id="{D997B5FA-0921-464F-AAE1-844C04324D75}" type="datetimeFigureOut">
               <a:rPr lang="zh-CN" altLang="en-US" smtClean="0"/>
-              <a:t>2026/6/16</a:t>
+              <a:t>2026/7/1</a:t>
             </a:fld>
             <a:endParaRPr lang="zh-CN" altLang="en-US"/>
           </a:p>
@@ -1737,7 +1737,7 @@
           <a:p>
             <a:fld id="{D997B5FA-0921-464F-AAE1-844C04324D75}" type="datetimeFigureOut">
               <a:rPr lang="zh-CN" altLang="en-US" smtClean="0"/>
-              <a:t>2026/6/16</a:t>
+              <a:t>2026/7/1</a:t>
             </a:fld>
             <a:endParaRPr lang="zh-CN" altLang="en-US"/>
           </a:p>
@@ -1832,7 +1832,7 @@
           <a:p>
             <a:fld id="{D997B5FA-0921-464F-AAE1-844C04324D75}" type="datetimeFigureOut">
               <a:rPr lang="zh-CN" altLang="en-US" smtClean="0"/>
-              <a:t>2026/6/16</a:t>
+              <a:t>2026/7/1</a:t>
             </a:fld>
             <a:endParaRPr lang="zh-CN" altLang="en-US"/>
           </a:p>
@@ -2109,7 +2109,7 @@
           <a:p>
             <a:fld id="{D997B5FA-0921-464F-AAE1-844C04324D75}" type="datetimeFigureOut">
               <a:rPr lang="zh-CN" altLang="en-US" smtClean="0"/>
-              <a:t>2026/6/16</a:t>
+              <a:t>2026/7/1</a:t>
             </a:fld>
             <a:endParaRPr lang="zh-CN" altLang="en-US"/>
           </a:p>
@@ -2366,7 +2366,7 @@
           <a:p>
             <a:fld id="{D997B5FA-0921-464F-AAE1-844C04324D75}" type="datetimeFigureOut">
               <a:rPr lang="zh-CN" altLang="en-US" smtClean="0"/>
-              <a:t>2026/6/16</a:t>
+              <a:t>2026/7/1</a:t>
             </a:fld>
             <a:endParaRPr lang="zh-CN" altLang="en-US"/>
           </a:p>
@@ -2579,7 +2579,7 @@
           <a:p>
             <a:fld id="{D997B5FA-0921-464F-AAE1-844C04324D75}" type="datetimeFigureOut">
               <a:rPr lang="zh-CN" altLang="en-US" smtClean="0"/>
-              <a:t>2026/6/16</a:t>
+              <a:t>2026/7/1</a:t>
             </a:fld>
             <a:endParaRPr lang="zh-CN" altLang="en-US"/>
           </a:p>
@@ -7817,7 +7817,29 @@
                 <a:ea typeface="Arial"/>
                 <a:cs typeface="Arial"/>
               </a:rPr>
-              <a:t>Exucution Validation</a:t>
+              <a:t>Ex</a:t>
+            </a:r>
+            <a:r>
+              <a:rPr lang="en-US" altLang="zh-CN" sz="2550">
+                <a:solidFill>
+                  <a:srgbClr val="000000"/>
+                </a:solidFill>
+                <a:latin typeface="Arial"/>
+                <a:ea typeface="Arial"/>
+                <a:cs typeface="Arial"/>
+              </a:rPr>
+              <a:t>e</a:t>
+            </a:r>
+            <a:r>
+              <a:rPr lang="en-US" sz="2550">
+                <a:solidFill>
+                  <a:srgbClr val="000000"/>
+                </a:solidFill>
+                <a:latin typeface="Arial"/>
+                <a:ea typeface="Arial"/>
+                <a:cs typeface="Arial"/>
+              </a:rPr>
+              <a:t>cution Validation</a:t>
             </a:r>
             <a:endParaRPr sz="2550">
               <a:solidFill>
